--- a/technikdidaktisches-kolloquium/praesentationen/TdK_Termin-2_Mehrperspektivisch-Methoden-Modelle.pptx
+++ b/technikdidaktisches-kolloquium/praesentationen/TdK_Termin-2_Mehrperspektivisch-Methoden-Modelle.pptx
@@ -5622,7 +5622,7 @@
                   <a:srgbClr val="14232F"/>
                 </a:solidFill>
               </a:rPr>
-              <a:t>Lernplattform: </a:t>
+              <a:t>Kursseite: </a:t>
             </a:r>
             <a:pPr indent="0" marL="0">
               <a:buNone/>
@@ -5684,7 +5684,7 @@
       </p:sp>
       <p:pic>
         <p:nvPicPr>
-          <p:cNvPr id="8" name="qr-235" descr="QR-Code zur Lernplattform: https://t1p.de/tdk-26">    </p:cNvPr>
+          <p:cNvPr id="8" name="qr-235" descr="QR-Code zur Kursseite: https://t1p.de/tdk-26">    </p:cNvPr>
           <p:cNvPicPr>
             <a:picLocks noChangeAspect="1"/>
           </p:cNvPicPr>
